--- a/decks/englang-p1/englang-p1_ch2_q1-find-information.pptx
+++ b/decks/englang-p1/englang-p1_ch2_q1-find-information.pptx
@@ -124,29 +124,29 @@
   <p:extLst>
     <p:ext uri="{521415D9-36F7-43E2-AB2F-B90AF26B5E84}">
       <p14:sectionLst xmlns:p14="http://schemas.microsoft.com/office/powerpoint/2010/main">
-        <p14:section name="Opening" id="{53ea4535-f02c-088c-e1a7-0377ead0f902}">
+        <p14:section name="Opening" id="{b8e44128-1fe8-9cfd-6aa7-228913ecdb34}">
           <p14:sldIdLst>
             <p14:sldId id="256"/>
           </p14:sldIdLst>
         </p14:section>
-        <p14:section name="Gate" id="{2945be0d-c775-8fa1-10d1-23bcc0c3722d}">
+        <p14:section name="Gate" id="{e3d0546d-22fc-6c0c-811d-e2c6c69c3f2c}">
           <p14:sldIdLst>
             <p14:sldId id="257"/>
             <p14:sldId id="258"/>
           </p14:sldIdLst>
         </p14:section>
-        <p14:section name="Pre-teach" id="{9316d05d-bd94-359a-e7df-6e46a1b95427}">
+        <p14:section name="Pre-teach" id="{28f6499a-c0de-1557-6788-f2e37169ff0d}">
           <p14:sldIdLst>
             <p14:sldId id="259"/>
           </p14:sldIdLst>
         </p14:section>
-        <p14:section name="Read-along" id="{147532e5-d379-fe36-8400-1b76bc07969f}">
+        <p14:section name="Read-along" id="{3518ae80-b3ef-e4cc-072a-bbae258278a3}">
           <p14:sldIdLst>
             <p14:sldId id="260"/>
             <p14:sldId id="261"/>
           </p14:sldIdLst>
         </p14:section>
-        <p14:section name="Teach" id="{3fe3d7ff-f87f-6e48-7bbc-9f0aff0d99f2}">
+        <p14:section name="Teach" id="{d567671a-15c3-1351-0287-4119eac33776}">
           <p14:sldIdLst>
             <p14:sldId id="262"/>
             <p14:sldId id="263"/>
@@ -155,19 +155,19 @@
             <p14:sldId id="266"/>
           </p14:sldIdLst>
         </p14:section>
-        <p14:section name="Routes" id="{3c1a1c41-4563-b278-2e8f-bacfb4c6b739}">
+        <p14:section name="Routes" id="{a90b639e-f4d2-7cf7-283c-d54ee15872d8}">
           <p14:sldIdLst>
             <p14:sldId id="267"/>
             <p14:sldId id="268"/>
             <p14:sldId id="269"/>
           </p14:sldIdLst>
         </p14:section>
-        <p14:section name="Close" id="{4ab3cfe6-165b-69f5-24d6-d91d0079073f}">
+        <p14:section name="Close" id="{2e351faf-ca83-dc9d-2c74-de11c45e347b}">
           <p14:sldIdLst>
             <p14:sldId id="270"/>
           </p14:sldIdLst>
         </p14:section>
-        <p14:section name="Answers" id="{34dc98d7-36ff-7fd6-8607-1bbb3dffbe2f}">
+        <p14:section name="Answers" id="{ed11e213-63d9-eebe-6895-e8e5f44c7fb3}">
           <p14:sldIdLst>
             <p14:sldId id="271"/>
             <p14:sldId id="272"/>
@@ -1137,7 +1137,7 @@
               <a:rPr lang="en-US" dirty="0"/>
               <a:t>Exit ticket — individual, silent, on a slip or mini-whiteboard. Recall before help: no notes, no lanes, no hints. Collect before pupils leave.
 Question: Question 1 practice. Read Part 1. Which statement about Nell is true?
-Answer: A   She has been waiting for an hour.. “Nell had been waiting for an hour.” Her suitcase is blue, not a red rucksack; she talks to no one; and it is “the last ferry of the year”, not the first.
+Answer: D   She has been waiting for an hour.. “Nell had been waiting for an hour.” Her suitcase is blue, not a red rucksack; she talks to no one; and it is “the last ferry of the year”, not the first.
 Source of this question: module 3 task ("True about Nell") from the manifest.
 Sort the slips: correct → ready to move on; incorrect → start next lesson in the pre-teach group, with the read-along and the Support lane. Same destination next time.</a:t>
             </a:r>
@@ -1228,7 +1228,7 @@
             <a:r>
               <a:rPr lang="en-US" dirty="0"/>
               <a:t>Answers — task 1: Weather check. Reveal the answer; pupils mark their own work in a different colour, then read the "why" together. Same destination for every lane, so one answer serves the whole class.
-Answer: B   It is windy, but the rain has not arrived yet.
+Answer: A   It is windy, but the rain has not arrived yet.
 Why: The wind comes in “long, cold breaths”, and “Rain had not yet arrived”. So it is windy, and the rain has not started.
 Ask a Support pupil to explain one step, and a Stretch pupil to share their extension.</a:t>
             </a:r>
@@ -1410,7 +1410,7 @@
             <a:r>
               <a:rPr lang="en-US" dirty="0"/>
               <a:t>Answers — exit ticket: Exit ticket. Reveal the answer; pupils mark their own work in a different colour, then read the "why" together. Same destination for every lane, so one answer serves the whole class.
-Answer: A   She has been waiting for an hour.
+Answer: D   She has been waiting for an hour.
 Why: “Nell had been waiting for an hour.” Her suitcase is blue, not a red rucksack; she talks to no one; and it is “the last ferry of the year”, not the first.
 Ask a Support pupil to explain one step, and a Stretch pupil to share their extension.</a:t>
             </a:r>
@@ -1501,9 +1501,9 @@
             <a:r>
               <a:rPr lang="en-US" dirty="0"/>
               <a:t>Do now — retrieval. Silent, no notes, no help: recall comes before any support. Give about four minutes.
-1. How many marks is Question 1 worth?  →  B   4
+1. How many marks is Question 1 worth?  →  C   4
 2. Question 1 checks information that is ___ in the source.  →  explicit
-3. In what order do the Question 1 parts follow the source?  →  B   The order of the source, from beginning to end
+3. In what order do the Question 1 parts follow the source?  →  A   The order of the source, from beginning to end
 Circulate: who gets 3/3 (Stretch route), 2/3 (Core), 0–1 (Support)? Use this to route pupils later in the lesson.</a:t>
             </a:r>
             <a:endParaRPr lang="en-US" dirty="0"/>
@@ -1593,9 +1593,9 @@
             <a:r>
               <a:rPr lang="en-US" dirty="0"/>
               <a:t>Answers — pupils mark their own in a different colour, then hands up for 3/3, 2/3, 1/3.
-1. B   4. Question 1 has four parts, each worth 1 mark: 4 marks in total.
+1. C   4. Question 1 has four parts, each worth 1 mark: 4 marks in total.
 2. explicit. Question 1 is retrieval: the information is clearly stated in the lines.
-3. B   The order of the source, from beginning to end. The parts are chronological: they follow the source in order.
+3. A   The order of the source, from beginning to end. The parts are chronological: they follow the source in order.
 Say the route each score points to: 3/3 Stretch, 2/3 Core, 0–1 Support. Pupils may choose to move up.</a:t>
             </a:r>
             <a:endParaRPr lang="en-US" dirty="0"/>
@@ -5391,7 +5391,7 @@
                 <a:ea typeface="Calibri" pitchFamily="34" charset="-122"/>
                 <a:cs typeface="Calibri" pitchFamily="34" charset="-120"/>
               </a:rPr>
-              <a:t>It is raining heavily.</a:t>
+              <a:t>It is windy, but the rain has not arrived yet.</a:t>
             </a:r>
             <a:endParaRPr lang="en-US" sz="2600" dirty="0"/>
           </a:p>
@@ -5428,7 +5428,7 @@
                 <a:ea typeface="Calibri" pitchFamily="34" charset="-122"/>
                 <a:cs typeface="Calibri" pitchFamily="34" charset="-120"/>
               </a:rPr>
-              <a:t>It is windy, but the rain has not arrived yet.</a:t>
+              <a:t>It is raining heavily.</a:t>
             </a:r>
             <a:endParaRPr lang="en-US" sz="2600" dirty="0"/>
           </a:p>
@@ -5465,7 +5465,7 @@
                 <a:ea typeface="Calibri" pitchFamily="34" charset="-122"/>
                 <a:cs typeface="Calibri" pitchFamily="34" charset="-120"/>
               </a:rPr>
-              <a:t>It is calm and sunny.</a:t>
+              <a:t>It is snowing.</a:t>
             </a:r>
             <a:endParaRPr lang="en-US" sz="2600" dirty="0"/>
           </a:p>
@@ -5502,7 +5502,7 @@
                 <a:ea typeface="Calibri" pitchFamily="34" charset="-122"/>
                 <a:cs typeface="Calibri" pitchFamily="34" charset="-120"/>
               </a:rPr>
-              <a:t>It is snowing.</a:t>
+              <a:t>It is calm and sunny.</a:t>
             </a:r>
             <a:endParaRPr lang="en-US" sz="2600" dirty="0"/>
           </a:p>
@@ -6907,7 +6907,7 @@
                 <a:ea typeface="Calibri" pitchFamily="34" charset="-122"/>
                 <a:cs typeface="Calibri" pitchFamily="34" charset="-120"/>
               </a:rPr>
-              <a:t>In the café on the quay</a:t>
+              <a:t>On one of the fishing boats</a:t>
             </a:r>
             <a:endParaRPr lang="en-US" sz="2000" dirty="0"/>
           </a:p>
@@ -6944,7 +6944,7 @@
                 <a:ea typeface="Calibri" pitchFamily="34" charset="-122"/>
                 <a:cs typeface="Calibri" pitchFamily="34" charset="-120"/>
               </a:rPr>
-              <a:t>On one of the fishing boats</a:t>
+              <a:t>On top of the sea wall</a:t>
             </a:r>
             <a:endParaRPr lang="en-US" sz="2000" dirty="0"/>
           </a:p>
@@ -7018,7 +7018,7 @@
                 <a:ea typeface="Calibri" pitchFamily="34" charset="-122"/>
                 <a:cs typeface="Calibri" pitchFamily="34" charset="-120"/>
               </a:rPr>
-              <a:t>On top of the sea wall</a:t>
+              <a:t>In the café on the quay</a:t>
             </a:r>
             <a:endParaRPr lang="en-US" sz="2000" dirty="0"/>
           </a:p>
@@ -8008,7 +8008,7 @@
                 <a:ea typeface="Calibri" pitchFamily="34" charset="-122"/>
                 <a:cs typeface="Calibri" pitchFamily="34" charset="-120"/>
               </a:rPr>
-              <a:t>She has been waiting for an hour.</a:t>
+              <a:t>She is talking to the gulls.</a:t>
             </a:r>
             <a:endParaRPr lang="en-US" sz="2400" dirty="0"/>
           </a:p>
@@ -8082,7 +8082,7 @@
                 <a:ea typeface="Calibri" pitchFamily="34" charset="-122"/>
                 <a:cs typeface="Calibri" pitchFamily="34" charset="-120"/>
               </a:rPr>
-              <a:t>She is talking to the gulls.</a:t>
+              <a:t>She plans to catch the first ferry of the year.</a:t>
             </a:r>
             <a:endParaRPr lang="en-US" sz="2400" dirty="0"/>
           </a:p>
@@ -8119,7 +8119,7 @@
                 <a:ea typeface="Calibri" pitchFamily="34" charset="-122"/>
                 <a:cs typeface="Calibri" pitchFamily="34" charset="-120"/>
               </a:rPr>
-              <a:t>She plans to catch the first ferry of the year.</a:t>
+              <a:t>She has been waiting for an hour.</a:t>
             </a:r>
             <a:endParaRPr lang="en-US" sz="2400" dirty="0"/>
           </a:p>
@@ -8524,7 +8524,7 @@
                 <a:ea typeface="Cambria" pitchFamily="34" charset="-122"/>
                 <a:cs typeface="Cambria" pitchFamily="34" charset="-120"/>
               </a:rPr>
-              <a:t>B   It is windy, but the rain has not arrived yet.</a:t>
+              <a:t>A   It is windy, but the rain has not arrived yet.</a:t>
             </a:r>
             <a:endParaRPr lang="en-US" sz="1800" dirty="0"/>
           </a:p>
@@ -9442,7 +9442,7 @@
                 <a:ea typeface="Cambria" pitchFamily="34" charset="-122"/>
                 <a:cs typeface="Cambria" pitchFamily="34" charset="-120"/>
               </a:rPr>
-              <a:t>A   She has been waiting for an hour.</a:t>
+              <a:t>D   She has been waiting for an hour.</a:t>
             </a:r>
             <a:endParaRPr lang="en-US" sz="1800" dirty="0"/>
           </a:p>
@@ -9976,7 +9976,7 @@
                 <a:ea typeface="Calibri" pitchFamily="34" charset="-122"/>
                 <a:cs typeface="Calibri" pitchFamily="34" charset="-120"/>
               </a:rPr>
-              <a:t>2</a:t>
+              <a:t>20</a:t>
             </a:r>
             <a:endParaRPr lang="en-US" sz="2400" dirty="0"/>
           </a:p>
@@ -10013,7 +10013,7 @@
                 <a:ea typeface="Calibri" pitchFamily="34" charset="-122"/>
                 <a:cs typeface="Calibri" pitchFamily="34" charset="-120"/>
               </a:rPr>
-              <a:t>4</a:t>
+              <a:t>8</a:t>
             </a:r>
             <a:endParaRPr lang="en-US" sz="2400" dirty="0"/>
           </a:p>
@@ -10050,7 +10050,7 @@
                 <a:ea typeface="Calibri" pitchFamily="34" charset="-122"/>
                 <a:cs typeface="Calibri" pitchFamily="34" charset="-120"/>
               </a:rPr>
-              <a:t>8</a:t>
+              <a:t>4</a:t>
             </a:r>
             <a:endParaRPr lang="en-US" sz="2400" dirty="0"/>
           </a:p>
@@ -10087,7 +10087,7 @@
                 <a:ea typeface="Calibri" pitchFamily="34" charset="-122"/>
                 <a:cs typeface="Calibri" pitchFamily="34" charset="-120"/>
               </a:rPr>
-              <a:t>20</a:t>
+              <a:t>2</a:t>
             </a:r>
             <a:endParaRPr lang="en-US" sz="2400" dirty="0"/>
           </a:p>
@@ -10489,7 +10489,7 @@
                 <a:ea typeface="Calibri" pitchFamily="34" charset="-122"/>
                 <a:cs typeface="Calibri" pitchFamily="34" charset="-120"/>
               </a:rPr>
-              <a:t>A random order</a:t>
+              <a:t>The order of the source, from beginning to end</a:t>
             </a:r>
             <a:endParaRPr lang="en-US" sz="2000" dirty="0"/>
           </a:p>
@@ -10526,7 +10526,7 @@
                 <a:ea typeface="Calibri" pitchFamily="34" charset="-122"/>
                 <a:cs typeface="Calibri" pitchFamily="34" charset="-120"/>
               </a:rPr>
-              <a:t>The order of the source, from beginning to end</a:t>
+              <a:t>From the end back to the beginning</a:t>
             </a:r>
             <a:endParaRPr lang="en-US" sz="2000" dirty="0"/>
           </a:p>
@@ -10563,7 +10563,7 @@
                 <a:ea typeface="Calibri" pitchFamily="34" charset="-122"/>
                 <a:cs typeface="Calibri" pitchFamily="34" charset="-120"/>
               </a:rPr>
-              <a:t>Hardest first</a:t>
+              <a:t>A random order</a:t>
             </a:r>
             <a:endParaRPr lang="en-US" sz="2000" dirty="0"/>
           </a:p>
@@ -10600,7 +10600,7 @@
                 <a:ea typeface="Calibri" pitchFamily="34" charset="-122"/>
                 <a:cs typeface="Calibri" pitchFamily="34" charset="-120"/>
               </a:rPr>
-              <a:t>From the end back to the beginning</a:t>
+              <a:t>Hardest first</a:t>
             </a:r>
             <a:endParaRPr lang="en-US" sz="2000" dirty="0"/>
           </a:p>
@@ -11001,7 +11001,7 @@
                 <a:ea typeface="Calibri" pitchFamily="34" charset="-122"/>
                 <a:cs typeface="Calibri" pitchFamily="34" charset="-120"/>
               </a:rPr>
-              <a:t>B   4</a:t>
+              <a:t>C   4</a:t>
             </a:r>
             <a:endParaRPr lang="en-US" sz="2200" dirty="0"/>
           </a:p>
@@ -11501,7 +11501,7 @@
                 <a:ea typeface="Calibri" pitchFamily="34" charset="-122"/>
                 <a:cs typeface="Calibri" pitchFamily="34" charset="-120"/>
               </a:rPr>
-              <a:t>B   The order of the source, from beginning to end</a:t>
+              <a:t>A   The order of the source, from beginning to end</a:t>
             </a:r>
             <a:endParaRPr lang="en-US" sz="2200" dirty="0"/>
           </a:p>

--- a/decks/englang-p1/englang-p1_ch2_q1-find-information.pptx
+++ b/decks/englang-p1/englang-p1_ch2_q1-find-information.pptx
@@ -124,29 +124,29 @@
   <p:extLst>
     <p:ext uri="{521415D9-36F7-43E2-AB2F-B90AF26B5E84}">
       <p14:sectionLst xmlns:p14="http://schemas.microsoft.com/office/powerpoint/2010/main">
-        <p14:section name="Opening" id="{b8e44128-1fe8-9cfd-6aa7-228913ecdb34}">
+        <p14:section name="Opening" id="{7da2dec8-9da4-775d-52d9-c80122f03443}">
           <p14:sldIdLst>
             <p14:sldId id="256"/>
           </p14:sldIdLst>
         </p14:section>
-        <p14:section name="Gate" id="{e3d0546d-22fc-6c0c-811d-e2c6c69c3f2c}">
+        <p14:section name="Gate" id="{8a282029-b641-5090-9f2a-a2e135914418}">
           <p14:sldIdLst>
             <p14:sldId id="257"/>
             <p14:sldId id="258"/>
           </p14:sldIdLst>
         </p14:section>
-        <p14:section name="Pre-teach" id="{28f6499a-c0de-1557-6788-f2e37169ff0d}">
+        <p14:section name="Pre-teach" id="{fab32326-cedb-22fc-0658-eb727224cf75}">
           <p14:sldIdLst>
             <p14:sldId id="259"/>
           </p14:sldIdLst>
         </p14:section>
-        <p14:section name="Read-along" id="{3518ae80-b3ef-e4cc-072a-bbae258278a3}">
+        <p14:section name="Read-along" id="{0ae9bc9a-cf9d-58cf-d88e-6eff5ef1531a}">
           <p14:sldIdLst>
             <p14:sldId id="260"/>
             <p14:sldId id="261"/>
           </p14:sldIdLst>
         </p14:section>
-        <p14:section name="Teach" id="{d567671a-15c3-1351-0287-4119eac33776}">
+        <p14:section name="Teach" id="{65300e03-7cde-dcc4-8b67-e80fbb087a02}">
           <p14:sldIdLst>
             <p14:sldId id="262"/>
             <p14:sldId id="263"/>
@@ -155,19 +155,19 @@
             <p14:sldId id="266"/>
           </p14:sldIdLst>
         </p14:section>
-        <p14:section name="Routes" id="{a90b639e-f4d2-7cf7-283c-d54ee15872d8}">
+        <p14:section name="Routes" id="{577ca04c-61a9-816d-27d0-25d8964f867e}">
           <p14:sldIdLst>
             <p14:sldId id="267"/>
             <p14:sldId id="268"/>
             <p14:sldId id="269"/>
           </p14:sldIdLst>
         </p14:section>
-        <p14:section name="Close" id="{2e351faf-ca83-dc9d-2c74-de11c45e347b}">
+        <p14:section name="Close" id="{f6302821-0868-edd6-fe2c-d013084f99b5}">
           <p14:sldIdLst>
             <p14:sldId id="270"/>
           </p14:sldIdLst>
         </p14:section>
-        <p14:section name="Answers" id="{ed11e213-63d9-eebe-6895-e8e5f44c7fb3}">
+        <p14:section name="Answers" id="{9a071e77-60c8-368d-ee9c-aee64679f34c}">
           <p14:sldIdLst>
             <p14:sldId id="271"/>
             <p14:sldId id="272"/>
